--- a/docs/Motion-Pose_汇报.pptx
+++ b/docs/Motion-Pose_汇报.pptx
@@ -17,7 +17,8 @@
     <p:sldId id="265" r:id="rId11"/>
     <p:sldId id="266" r:id="rId12"/>
     <p:sldId id="267" r:id="rId13"/>
-    <p:sldId id="269" r:id="rId14"/>
+    <p:sldId id="270" r:id="rId14"/>
+    <p:sldId id="269" r:id="rId15"/>
   </p:sldIdLst>
   <p:sldSz cx="12192000" cy="6858000"/>
   <p:notesSz cx="6858000" cy="9144000"/>
@@ -135,6 +136,292 @@
 </p:presentation>
 </file>
 
+<file path=ppt/charts/chart1.xml><?xml version="1.0" encoding="utf-8"?>
+<c:chartSpace xmlns:c="http://schemas.openxmlformats.org/drawingml/2006/chart" xmlns:a="http://schemas.openxmlformats.org/drawingml/2006/main" xmlns:r="http://schemas.openxmlformats.org/officeDocument/2006/relationships" xmlns:c16r2="http://schemas.microsoft.com/office/drawing/2015/06/chart">
+  <c:date1904 val="0"/>
+  <c:lang val="zh-CN"/>
+  <c:roundedCorners val="1"/>
+  <c:style val="2"/>
+  <c:chart>
+    <c:title>
+      <c:tx>
+        <c:rich>
+          <a:bodyPr/>
+          <a:lstStyle/>
+          <a:p>
+            <a:pPr>
+              <a:defRPr sz="1200">
+                <a:latin typeface="微软雅黑" panose="020B0503020204020204" pitchFamily="34" charset="-122"/>
+                <a:ea typeface="微软雅黑" panose="020B0503020204020204" pitchFamily="34" charset="-122"/>
+              </a:defRPr>
+            </a:pPr>
+            <a:r>
+              <a:rPr lang="zh-CN" altLang="en-US">
+                <a:latin typeface="微软雅黑" panose="020B0503020204020204" pitchFamily="34" charset="-122"/>
+                <a:ea typeface="微软雅黑" panose="020B0503020204020204" pitchFamily="34" charset="-122"/>
+              </a:rPr>
+              <a:t>论文记录 </a:t>
+            </a:r>
+            <a:r>
+              <a:rPr lang="en-US" altLang="zh-CN">
+                <a:latin typeface="微软雅黑" panose="020B0503020204020204" pitchFamily="34" charset="-122"/>
+                <a:ea typeface="微软雅黑" panose="020B0503020204020204" pitchFamily="34" charset="-122"/>
+              </a:rPr>
+              <a:t>vs </a:t>
+            </a:r>
+            <a:r>
+              <a:rPr lang="zh-CN" altLang="en-US">
+                <a:latin typeface="微软雅黑" panose="020B0503020204020204" pitchFamily="34" charset="-122"/>
+                <a:ea typeface="微软雅黑" panose="020B0503020204020204" pitchFamily="34" charset="-122"/>
+              </a:rPr>
+              <a:t>本次复现</a:t>
+            </a:r>
+          </a:p>
+        </c:rich>
+      </c:tx>
+      <c:overlay val="0"/>
+    </c:title>
+    <c:autoTitleDeleted val="0"/>
+    <c:plotArea>
+      <c:layout/>
+      <c:barChart>
+        <c:barDir val="col"/>
+        <c:grouping val="clustered"/>
+        <c:varyColors val="1"/>
+        <c:ser>
+          <c:idx val="0"/>
+          <c:order val="0"/>
+          <c:tx>
+            <c:strRef>
+              <c:f>Sheet1!$B$1</c:f>
+              <c:strCache>
+                <c:ptCount val="1"/>
+                <c:pt idx="0">
+                  <c:v>论文/记录</c:v>
+                </c:pt>
+              </c:strCache>
+            </c:strRef>
+          </c:tx>
+          <c:spPr>
+            <a:solidFill>
+              <a:srgbClr val="265DAA"/>
+            </a:solidFill>
+          </c:spPr>
+          <c:invertIfNegative val="1"/>
+          <c:cat>
+            <c:strRef>
+              <c:f>Sheet1!$A$2:$A$3</c:f>
+              <c:strCache>
+                <c:ptCount val="2"/>
+                <c:pt idx="0">
+                  <c:v>Motion SRC</c:v>
+                </c:pt>
+                <c:pt idx="1">
+                  <c:v>Pose F1</c:v>
+                </c:pt>
+              </c:strCache>
+            </c:strRef>
+          </c:cat>
+          <c:val>
+            <c:numRef>
+              <c:f>Sheet1!$B$2:$B$3</c:f>
+              <c:numCache>
+                <c:formatCode>General</c:formatCode>
+                <c:ptCount val="2"/>
+                <c:pt idx="0">
+                  <c:v>0.77629999999999999</c:v>
+                </c:pt>
+                <c:pt idx="1">
+                  <c:v>0.77629999999999999</c:v>
+                </c:pt>
+              </c:numCache>
+            </c:numRef>
+          </c:val>
+          <c:extLst>
+            <c:ext xmlns:c14="http://schemas.microsoft.com/office/drawing/2007/8/2/chart" uri="{6F2FDCE9-48DA-4B69-8628-5D25D57E5C99}">
+              <c14:invertSolidFillFmt>
+                <c14:spPr xmlns:c14="http://schemas.microsoft.com/office/drawing/2007/8/2/chart">
+                  <a:solidFill>
+                    <a:srgbClr val="FFFFFF"/>
+                  </a:solidFill>
+                </c14:spPr>
+              </c14:invertSolidFillFmt>
+            </c:ext>
+            <c:ext xmlns:c16="http://schemas.microsoft.com/office/drawing/2014/chart" uri="{C3380CC4-5D6E-409C-BE32-E72D297353CC}">
+              <c16:uniqueId val="{00000000-4A4B-43A9-989C-3E709D54E22F}"/>
+            </c:ext>
+          </c:extLst>
+        </c:ser>
+        <c:ser>
+          <c:idx val="1"/>
+          <c:order val="1"/>
+          <c:tx>
+            <c:strRef>
+              <c:f>Sheet1!$C$1</c:f>
+              <c:strCache>
+                <c:ptCount val="1"/>
+                <c:pt idx="0">
+                  <c:v>本次复现</c:v>
+                </c:pt>
+              </c:strCache>
+            </c:strRef>
+          </c:tx>
+          <c:spPr>
+            <a:solidFill>
+              <a:srgbClr val="008E96"/>
+            </a:solidFill>
+          </c:spPr>
+          <c:invertIfNegative val="1"/>
+          <c:cat>
+            <c:strRef>
+              <c:f>Sheet1!$A$2:$A$3</c:f>
+              <c:strCache>
+                <c:ptCount val="2"/>
+                <c:pt idx="0">
+                  <c:v>Motion SRC</c:v>
+                </c:pt>
+                <c:pt idx="1">
+                  <c:v>Pose F1</c:v>
+                </c:pt>
+              </c:strCache>
+            </c:strRef>
+          </c:cat>
+          <c:val>
+            <c:numRef>
+              <c:f>Sheet1!$C$2:$C$3</c:f>
+              <c:numCache>
+                <c:formatCode>General</c:formatCode>
+                <c:ptCount val="2"/>
+                <c:pt idx="0">
+                  <c:v>0.7661</c:v>
+                </c:pt>
+                <c:pt idx="1">
+                  <c:v>0.4052</c:v>
+                </c:pt>
+              </c:numCache>
+            </c:numRef>
+          </c:val>
+          <c:extLst>
+            <c:ext xmlns:c14="http://schemas.microsoft.com/office/drawing/2007/8/2/chart" uri="{6F2FDCE9-48DA-4B69-8628-5D25D57E5C99}">
+              <c14:invertSolidFillFmt>
+                <c14:spPr xmlns:c14="http://schemas.microsoft.com/office/drawing/2007/8/2/chart">
+                  <a:solidFill>
+                    <a:srgbClr val="FFFFFF"/>
+                  </a:solidFill>
+                </c14:spPr>
+              </c14:invertSolidFillFmt>
+            </c:ext>
+            <c:ext xmlns:c16="http://schemas.microsoft.com/office/drawing/2014/chart" uri="{C3380CC4-5D6E-409C-BE32-E72D297353CC}">
+              <c16:uniqueId val="{00000001-4A4B-43A9-989C-3E709D54E22F}"/>
+            </c:ext>
+          </c:extLst>
+        </c:ser>
+        <c:dLbls>
+          <c:showLegendKey val="0"/>
+          <c:showVal val="0"/>
+          <c:showCatName val="0"/>
+          <c:showSerName val="0"/>
+          <c:showPercent val="0"/>
+          <c:showBubbleSize val="0"/>
+        </c:dLbls>
+        <c:gapWidth val="150"/>
+        <c:axId val="-2068027336"/>
+        <c:axId val="-2113994440"/>
+      </c:barChart>
+      <c:catAx>
+        <c:axId val="-2068027336"/>
+        <c:scaling>
+          <c:orientation val="minMax"/>
+        </c:scaling>
+        <c:delete val="0"/>
+        <c:axPos val="b"/>
+        <c:numFmt formatCode="General" sourceLinked="0"/>
+        <c:majorTickMark val="out"/>
+        <c:minorTickMark val="none"/>
+        <c:tickLblPos val="nextTo"/>
+        <c:txPr>
+          <a:bodyPr/>
+          <a:lstStyle/>
+          <a:p>
+            <a:pPr>
+              <a:defRPr sz="800"/>
+            </a:pPr>
+            <a:endParaRPr lang="zh-CN"/>
+          </a:p>
+        </c:txPr>
+        <c:crossAx val="-2113994440"/>
+        <c:crosses val="autoZero"/>
+        <c:auto val="1"/>
+        <c:lblAlgn val="ctr"/>
+        <c:lblOffset val="100"/>
+        <c:noMultiLvlLbl val="0"/>
+      </c:catAx>
+      <c:valAx>
+        <c:axId val="-2113994440"/>
+        <c:scaling>
+          <c:orientation val="minMax"/>
+          <c:max val="1"/>
+          <c:min val="0"/>
+        </c:scaling>
+        <c:delete val="0"/>
+        <c:axPos val="l"/>
+        <c:majorGridlines/>
+        <c:numFmt formatCode="General" sourceLinked="1"/>
+        <c:majorTickMark val="out"/>
+        <c:minorTickMark val="none"/>
+        <c:tickLblPos val="nextTo"/>
+        <c:txPr>
+          <a:bodyPr/>
+          <a:lstStyle/>
+          <a:p>
+            <a:pPr>
+              <a:defRPr sz="800"/>
+            </a:pPr>
+            <a:endParaRPr lang="zh-CN"/>
+          </a:p>
+        </c:txPr>
+        <c:crossAx val="-2068027336"/>
+        <c:crosses val="autoZero"/>
+        <c:crossBetween val="between"/>
+      </c:valAx>
+    </c:plotArea>
+    <c:legend>
+      <c:legendPos val="b"/>
+      <c:overlay val="0"/>
+      <c:txPr>
+        <a:bodyPr/>
+        <a:lstStyle/>
+        <a:p>
+          <a:pPr>
+            <a:defRPr sz="1400">
+              <a:latin typeface="微软雅黑" panose="020B0503020204020204" pitchFamily="34" charset="-122"/>
+              <a:ea typeface="微软雅黑" panose="020B0503020204020204" pitchFamily="34" charset="-122"/>
+            </a:defRPr>
+          </a:pPr>
+          <a:endParaRPr lang="zh-CN"/>
+        </a:p>
+      </c:txPr>
+    </c:legend>
+    <c:plotVisOnly val="1"/>
+    <c:dispBlanksAs val="gap"/>
+    <c:showDLblsOverMax val="1"/>
+  </c:chart>
+  <c:txPr>
+    <a:bodyPr/>
+    <a:lstStyle/>
+    <a:p>
+      <a:pPr>
+        <a:defRPr sz="1800"/>
+      </a:pPr>
+      <a:endParaRPr lang="en-US"/>
+    </a:p>
+  </c:txPr>
+  <c:externalData r:id="rId1">
+    <c:autoUpdate val="0"/>
+  </c:externalData>
+</c:chartSpace>
+</file>
+
 <file path=ppt/slideLayouts/slideLayout1.xml><?xml version="1.0" encoding="utf-8"?>
 <p:sldLayout xmlns:a="http://schemas.openxmlformats.org/drawingml/2006/main" xmlns:r="http://schemas.openxmlformats.org/officeDocument/2006/relationships" xmlns:p="http://schemas.openxmlformats.org/presentationml/2006/main" type="title" preserve="1">
   <p:cSld name="Title Slide">
@@ -314,7 +601,7 @@
           <a:p>
             <a:fld id="{5BCAD085-E8A6-8845-BD4E-CB4CCA059FC4}" type="datetimeFigureOut">
               <a:rPr lang="en-US" smtClean="0"/>
-              <a:t>5/22/2026</a:t>
+              <a:t>5/23/2026</a:t>
             </a:fld>
             <a:endParaRPr lang="en-US"/>
           </a:p>
@@ -482,7 +769,7 @@
           <a:p>
             <a:fld id="{5BCAD085-E8A6-8845-BD4E-CB4CCA059FC4}" type="datetimeFigureOut">
               <a:rPr lang="en-US" smtClean="0"/>
-              <a:t>5/22/2026</a:t>
+              <a:t>5/23/2026</a:t>
             </a:fld>
             <a:endParaRPr lang="en-US"/>
           </a:p>
@@ -660,7 +947,7 @@
           <a:p>
             <a:fld id="{5BCAD085-E8A6-8845-BD4E-CB4CCA059FC4}" type="datetimeFigureOut">
               <a:rPr lang="en-US" smtClean="0"/>
-              <a:t>5/22/2026</a:t>
+              <a:t>5/23/2026</a:t>
             </a:fld>
             <a:endParaRPr lang="en-US"/>
           </a:p>
@@ -828,7 +1115,7 @@
           <a:p>
             <a:fld id="{5BCAD085-E8A6-8845-BD4E-CB4CCA059FC4}" type="datetimeFigureOut">
               <a:rPr lang="en-US" smtClean="0"/>
-              <a:t>5/22/2026</a:t>
+              <a:t>5/23/2026</a:t>
             </a:fld>
             <a:endParaRPr lang="en-US"/>
           </a:p>
@@ -1073,7 +1360,7 @@
           <a:p>
             <a:fld id="{5BCAD085-E8A6-8845-BD4E-CB4CCA059FC4}" type="datetimeFigureOut">
               <a:rPr lang="en-US" smtClean="0"/>
-              <a:t>5/22/2026</a:t>
+              <a:t>5/23/2026</a:t>
             </a:fld>
             <a:endParaRPr lang="en-US"/>
           </a:p>
@@ -1358,7 +1645,7 @@
           <a:p>
             <a:fld id="{5BCAD085-E8A6-8845-BD4E-CB4CCA059FC4}" type="datetimeFigureOut">
               <a:rPr lang="en-US" smtClean="0"/>
-              <a:t>5/22/2026</a:t>
+              <a:t>5/23/2026</a:t>
             </a:fld>
             <a:endParaRPr lang="en-US"/>
           </a:p>
@@ -1777,7 +2064,7 @@
           <a:p>
             <a:fld id="{5BCAD085-E8A6-8845-BD4E-CB4CCA059FC4}" type="datetimeFigureOut">
               <a:rPr lang="en-US" smtClean="0"/>
-              <a:t>5/22/2026</a:t>
+              <a:t>5/23/2026</a:t>
             </a:fld>
             <a:endParaRPr lang="en-US"/>
           </a:p>
@@ -1894,7 +2181,7 @@
           <a:p>
             <a:fld id="{5BCAD085-E8A6-8845-BD4E-CB4CCA059FC4}" type="datetimeFigureOut">
               <a:rPr lang="en-US" smtClean="0"/>
-              <a:t>5/22/2026</a:t>
+              <a:t>5/23/2026</a:t>
             </a:fld>
             <a:endParaRPr lang="en-US"/>
           </a:p>
@@ -1989,7 +2276,7 @@
           <a:p>
             <a:fld id="{5BCAD085-E8A6-8845-BD4E-CB4CCA059FC4}" type="datetimeFigureOut">
               <a:rPr lang="en-US" smtClean="0"/>
-              <a:t>5/22/2026</a:t>
+              <a:t>5/23/2026</a:t>
             </a:fld>
             <a:endParaRPr lang="en-US"/>
           </a:p>
@@ -2264,7 +2551,7 @@
           <a:p>
             <a:fld id="{5BCAD085-E8A6-8845-BD4E-CB4CCA059FC4}" type="datetimeFigureOut">
               <a:rPr lang="en-US" smtClean="0"/>
-              <a:t>5/22/2026</a:t>
+              <a:t>5/23/2026</a:t>
             </a:fld>
             <a:endParaRPr lang="en-US"/>
           </a:p>
@@ -2516,7 +2803,7 @@
           <a:p>
             <a:fld id="{5BCAD085-E8A6-8845-BD4E-CB4CCA059FC4}" type="datetimeFigureOut">
               <a:rPr lang="en-US" smtClean="0"/>
-              <a:t>5/22/2026</a:t>
+              <a:t>5/23/2026</a:t>
             </a:fld>
             <a:endParaRPr lang="en-US"/>
           </a:p>
@@ -2727,7 +3014,7 @@
           <a:p>
             <a:fld id="{5BCAD085-E8A6-8845-BD4E-CB4CCA059FC4}" type="datetimeFigureOut">
               <a:rPr lang="en-US" smtClean="0"/>
-              <a:t>5/22/2026</a:t>
+              <a:t>5/23/2026</a:t>
             </a:fld>
             <a:endParaRPr lang="en-US"/>
           </a:p>
@@ -6260,6 +6547,1920 @@
         <p:spPr>
           <a:xfrm>
             <a:off x="0" y="0"/>
+            <a:ext cx="12192000" cy="6858000"/>
+          </a:xfrm>
+          <a:prstGeom prst="rect">
+            <a:avLst/>
+          </a:prstGeom>
+          <a:solidFill>
+            <a:srgbClr val="F6F9FC"/>
+          </a:solidFill>
+          <a:ln>
+            <a:noFill/>
+          </a:ln>
+        </p:spPr>
+        <p:style>
+          <a:lnRef idx="1">
+            <a:schemeClr val="accent1"/>
+          </a:lnRef>
+          <a:fillRef idx="3">
+            <a:schemeClr val="accent1"/>
+          </a:fillRef>
+          <a:effectRef idx="2">
+            <a:schemeClr val="accent1"/>
+          </a:effectRef>
+          <a:fontRef idx="minor">
+            <a:schemeClr val="lt1"/>
+          </a:fontRef>
+        </p:style>
+        <p:txBody>
+          <a:bodyPr rtlCol="0" anchor="ctr"/>
+          <a:lstStyle/>
+          <a:p>
+            <a:pPr algn="ctr"/>
+            <a:endParaRPr/>
+          </a:p>
+        </p:txBody>
+      </p:sp>
+      <p:sp>
+        <p:nvSpPr>
+          <p:cNvPr id="3" name="Rectangle 2"/>
+          <p:cNvSpPr/>
+          <p:nvPr/>
+        </p:nvSpPr>
+        <p:spPr>
+          <a:xfrm>
+            <a:off x="0" y="0"/>
+            <a:ext cx="164592" cy="6858000"/>
+          </a:xfrm>
+          <a:prstGeom prst="rect">
+            <a:avLst/>
+          </a:prstGeom>
+          <a:solidFill>
+            <a:srgbClr val="008E96"/>
+          </a:solidFill>
+          <a:ln>
+            <a:noFill/>
+          </a:ln>
+        </p:spPr>
+        <p:style>
+          <a:lnRef idx="1">
+            <a:schemeClr val="accent1"/>
+          </a:lnRef>
+          <a:fillRef idx="3">
+            <a:schemeClr val="accent1"/>
+          </a:fillRef>
+          <a:effectRef idx="2">
+            <a:schemeClr val="accent1"/>
+          </a:effectRef>
+          <a:fontRef idx="minor">
+            <a:schemeClr val="lt1"/>
+          </a:fontRef>
+        </p:style>
+        <p:txBody>
+          <a:bodyPr rtlCol="0" anchor="ctr"/>
+          <a:lstStyle/>
+          <a:p>
+            <a:pPr algn="ctr"/>
+            <a:endParaRPr/>
+          </a:p>
+        </p:txBody>
+      </p:sp>
+      <p:sp>
+        <p:nvSpPr>
+          <p:cNvPr id="4" name="TextBox 3"/>
+          <p:cNvSpPr txBox="1"/>
+          <p:nvPr/>
+        </p:nvSpPr>
+        <p:spPr>
+          <a:xfrm>
+            <a:off x="594360" y="320040"/>
+            <a:ext cx="3200400" cy="292608"/>
+          </a:xfrm>
+          <a:prstGeom prst="rect">
+            <a:avLst/>
+          </a:prstGeom>
+          <a:noFill/>
+        </p:spPr>
+        <p:txBody>
+          <a:bodyPr wrap="square" anchor="t">
+            <a:spAutoFit/>
+          </a:bodyPr>
+          <a:lstStyle/>
+          <a:p>
+            <a:pPr algn="l">
+              <a:lnSpc>
+                <a:spcPct val="104000"/>
+              </a:lnSpc>
+            </a:pPr>
+            <a:r>
+              <a:rPr sz="1500" b="1">
+                <a:solidFill>
+                  <a:srgbClr val="008E96"/>
+                </a:solidFill>
+                <a:latin typeface="Microsoft YaHei"/>
+              </a:rPr>
+              <a:t>12 论文结果对比</a:t>
+            </a:r>
+          </a:p>
+        </p:txBody>
+      </p:sp>
+      <p:sp>
+        <p:nvSpPr>
+          <p:cNvPr id="5" name="TextBox 4"/>
+          <p:cNvSpPr txBox="1"/>
+          <p:nvPr/>
+        </p:nvSpPr>
+        <p:spPr>
+          <a:xfrm>
+            <a:off x="594360" y="725955"/>
+            <a:ext cx="10789920" cy="566928"/>
+          </a:xfrm>
+          <a:prstGeom prst="rect">
+            <a:avLst/>
+          </a:prstGeom>
+          <a:noFill/>
+        </p:spPr>
+        <p:txBody>
+          <a:bodyPr wrap="square" anchor="t">
+            <a:spAutoFit/>
+          </a:bodyPr>
+          <a:lstStyle/>
+          <a:p>
+            <a:pPr algn="l">
+              <a:lnSpc>
+                <a:spcPct val="104000"/>
+              </a:lnSpc>
+            </a:pPr>
+            <a:r>
+              <a:rPr sz="3200" b="1" dirty="0" err="1">
+                <a:solidFill>
+                  <a:srgbClr val="12264A"/>
+                </a:solidFill>
+                <a:latin typeface="Microsoft YaHei"/>
+              </a:rPr>
+              <a:t>与论文</a:t>
+            </a:r>
+            <a:r>
+              <a:rPr sz="3200" b="1" dirty="0">
+                <a:solidFill>
+                  <a:srgbClr val="12264A"/>
+                </a:solidFill>
+                <a:latin typeface="Microsoft YaHei"/>
+              </a:rPr>
+              <a:t>/</a:t>
+            </a:r>
+            <a:r>
+              <a:rPr sz="3200" b="1" dirty="0" err="1">
+                <a:solidFill>
+                  <a:srgbClr val="12264A"/>
+                </a:solidFill>
+                <a:latin typeface="Microsoft YaHei"/>
+              </a:rPr>
+              <a:t>官方记录的结果对比</a:t>
+            </a:r>
+            <a:r>
+              <a:rPr sz="3200" b="1" dirty="0">
+                <a:solidFill>
+                  <a:srgbClr val="12264A"/>
+                </a:solidFill>
+                <a:latin typeface="Microsoft YaHei"/>
+              </a:rPr>
+              <a:t> &amp; </a:t>
+            </a:r>
+            <a:r>
+              <a:rPr sz="3200" b="1" dirty="0" err="1">
+                <a:solidFill>
+                  <a:srgbClr val="12264A"/>
+                </a:solidFill>
+                <a:latin typeface="Microsoft YaHei"/>
+              </a:rPr>
+              <a:t>差距分析</a:t>
+            </a:r>
+            <a:endParaRPr sz="3200" b="1" dirty="0">
+              <a:solidFill>
+                <a:srgbClr val="12264A"/>
+              </a:solidFill>
+              <a:latin typeface="Microsoft YaHei"/>
+            </a:endParaRPr>
+          </a:p>
+        </p:txBody>
+      </p:sp>
+      <p:sp>
+        <p:nvSpPr>
+          <p:cNvPr id="6" name="TextBox 5"/>
+          <p:cNvSpPr txBox="1"/>
+          <p:nvPr/>
+        </p:nvSpPr>
+        <p:spPr>
+          <a:xfrm>
+            <a:off x="621792" y="1234440"/>
+            <a:ext cx="10515600" cy="347472"/>
+          </a:xfrm>
+          <a:prstGeom prst="rect">
+            <a:avLst/>
+          </a:prstGeom>
+          <a:noFill/>
+        </p:spPr>
+        <p:txBody>
+          <a:bodyPr wrap="square" anchor="t">
+            <a:spAutoFit/>
+          </a:bodyPr>
+          <a:lstStyle/>
+          <a:p>
+            <a:pPr algn="l">
+              <a:lnSpc>
+                <a:spcPct val="104000"/>
+              </a:lnSpc>
+            </a:pPr>
+            <a:r>
+              <a:rPr sz="1400" b="0">
+                <a:solidFill>
+                  <a:srgbClr val="5B6778"/>
+                </a:solidFill>
+                <a:latin typeface="Microsoft YaHei"/>
+              </a:rPr>
+              <a:t>只新增本页；用于补充“与官方复现差距”章节中的定量对比。</a:t>
+            </a:r>
+          </a:p>
+        </p:txBody>
+      </p:sp>
+      <p:sp>
+        <p:nvSpPr>
+          <p:cNvPr id="7" name="Rounded Rectangle 6"/>
+          <p:cNvSpPr/>
+          <p:nvPr/>
+        </p:nvSpPr>
+        <p:spPr>
+          <a:xfrm>
+            <a:off x="685800" y="1664208"/>
+            <a:ext cx="2423160" cy="1078992"/>
+          </a:xfrm>
+          <a:prstGeom prst="roundRect">
+            <a:avLst/>
+          </a:prstGeom>
+          <a:solidFill>
+            <a:srgbClr val="FFFFFF"/>
+          </a:solidFill>
+          <a:ln w="12700">
+            <a:solidFill>
+              <a:srgbClr val="DCE4EE"/>
+            </a:solidFill>
+          </a:ln>
+        </p:spPr>
+        <p:style>
+          <a:lnRef idx="1">
+            <a:schemeClr val="accent1"/>
+          </a:lnRef>
+          <a:fillRef idx="3">
+            <a:schemeClr val="accent1"/>
+          </a:fillRef>
+          <a:effectRef idx="2">
+            <a:schemeClr val="accent1"/>
+          </a:effectRef>
+          <a:fontRef idx="minor">
+            <a:schemeClr val="lt1"/>
+          </a:fontRef>
+        </p:style>
+        <p:txBody>
+          <a:bodyPr rtlCol="0" anchor="ctr"/>
+          <a:lstStyle/>
+          <a:p>
+            <a:pPr algn="ctr"/>
+            <a:endParaRPr/>
+          </a:p>
+        </p:txBody>
+      </p:sp>
+      <p:sp>
+        <p:nvSpPr>
+          <p:cNvPr id="8" name="TextBox 7"/>
+          <p:cNvSpPr txBox="1"/>
+          <p:nvPr/>
+        </p:nvSpPr>
+        <p:spPr>
+          <a:xfrm>
+            <a:off x="886968" y="1828800"/>
+            <a:ext cx="2020824" cy="256032"/>
+          </a:xfrm>
+          <a:prstGeom prst="rect">
+            <a:avLst/>
+          </a:prstGeom>
+          <a:noFill/>
+        </p:spPr>
+        <p:txBody>
+          <a:bodyPr wrap="square" anchor="t">
+            <a:spAutoFit/>
+          </a:bodyPr>
+          <a:lstStyle/>
+          <a:p>
+            <a:pPr algn="l">
+              <a:lnSpc>
+                <a:spcPct val="104000"/>
+              </a:lnSpc>
+            </a:pPr>
+            <a:r>
+              <a:rPr sz="1250" b="1">
+                <a:solidFill>
+                  <a:srgbClr val="5B6778"/>
+                </a:solidFill>
+                <a:latin typeface="Microsoft YaHei"/>
+              </a:rPr>
+              <a:t>论文 Motion SRC</a:t>
+            </a:r>
+          </a:p>
+        </p:txBody>
+      </p:sp>
+      <p:sp>
+        <p:nvSpPr>
+          <p:cNvPr id="9" name="TextBox 8"/>
+          <p:cNvSpPr txBox="1"/>
+          <p:nvPr/>
+        </p:nvSpPr>
+        <p:spPr>
+          <a:xfrm>
+            <a:off x="886968" y="2103120"/>
+            <a:ext cx="2020824" cy="402336"/>
+          </a:xfrm>
+          <a:prstGeom prst="rect">
+            <a:avLst/>
+          </a:prstGeom>
+          <a:noFill/>
+        </p:spPr>
+        <p:txBody>
+          <a:bodyPr wrap="square" anchor="t">
+            <a:spAutoFit/>
+          </a:bodyPr>
+          <a:lstStyle/>
+          <a:p>
+            <a:pPr algn="l">
+              <a:lnSpc>
+                <a:spcPct val="104000"/>
+              </a:lnSpc>
+            </a:pPr>
+            <a:r>
+              <a:rPr sz="2600" b="1">
+                <a:solidFill>
+                  <a:srgbClr val="265DAA"/>
+                </a:solidFill>
+                <a:latin typeface="Microsoft YaHei"/>
+              </a:rPr>
+              <a:t>0.7763</a:t>
+            </a:r>
+          </a:p>
+        </p:txBody>
+      </p:sp>
+      <p:sp>
+        <p:nvSpPr>
+          <p:cNvPr id="10" name="TextBox 9"/>
+          <p:cNvSpPr txBox="1"/>
+          <p:nvPr/>
+        </p:nvSpPr>
+        <p:spPr>
+          <a:xfrm>
+            <a:off x="886968" y="2487168"/>
+            <a:ext cx="2020824" cy="201168"/>
+          </a:xfrm>
+          <a:prstGeom prst="rect">
+            <a:avLst/>
+          </a:prstGeom>
+          <a:noFill/>
+        </p:spPr>
+        <p:txBody>
+          <a:bodyPr wrap="square" anchor="t">
+            <a:spAutoFit/>
+          </a:bodyPr>
+          <a:lstStyle/>
+          <a:p>
+            <a:pPr algn="l">
+              <a:lnSpc>
+                <a:spcPct val="104000"/>
+              </a:lnSpc>
+            </a:pPr>
+            <a:r>
+              <a:rPr sz="950" b="0">
+                <a:solidFill>
+                  <a:srgbClr val="5B6778"/>
+                </a:solidFill>
+                <a:latin typeface="Microsoft YaHei"/>
+              </a:rPr>
+              <a:t>MTL-AQA / MD</a:t>
+            </a:r>
+          </a:p>
+        </p:txBody>
+      </p:sp>
+      <p:sp>
+        <p:nvSpPr>
+          <p:cNvPr id="11" name="Rounded Rectangle 10"/>
+          <p:cNvSpPr/>
+          <p:nvPr/>
+        </p:nvSpPr>
+        <p:spPr>
+          <a:xfrm>
+            <a:off x="3310128" y="1664208"/>
+            <a:ext cx="2423160" cy="1078992"/>
+          </a:xfrm>
+          <a:prstGeom prst="roundRect">
+            <a:avLst/>
+          </a:prstGeom>
+          <a:solidFill>
+            <a:srgbClr val="FFFFFF"/>
+          </a:solidFill>
+          <a:ln w="12700">
+            <a:solidFill>
+              <a:srgbClr val="DCE4EE"/>
+            </a:solidFill>
+          </a:ln>
+        </p:spPr>
+        <p:style>
+          <a:lnRef idx="1">
+            <a:schemeClr val="accent1"/>
+          </a:lnRef>
+          <a:fillRef idx="3">
+            <a:schemeClr val="accent1"/>
+          </a:fillRef>
+          <a:effectRef idx="2">
+            <a:schemeClr val="accent1"/>
+          </a:effectRef>
+          <a:fontRef idx="minor">
+            <a:schemeClr val="lt1"/>
+          </a:fontRef>
+        </p:style>
+        <p:txBody>
+          <a:bodyPr rtlCol="0" anchor="ctr"/>
+          <a:lstStyle/>
+          <a:p>
+            <a:pPr algn="ctr"/>
+            <a:endParaRPr/>
+          </a:p>
+        </p:txBody>
+      </p:sp>
+      <p:sp>
+        <p:nvSpPr>
+          <p:cNvPr id="12" name="TextBox 11"/>
+          <p:cNvSpPr txBox="1"/>
+          <p:nvPr/>
+        </p:nvSpPr>
+        <p:spPr>
+          <a:xfrm>
+            <a:off x="3511296" y="1828800"/>
+            <a:ext cx="2020824" cy="256032"/>
+          </a:xfrm>
+          <a:prstGeom prst="rect">
+            <a:avLst/>
+          </a:prstGeom>
+          <a:noFill/>
+        </p:spPr>
+        <p:txBody>
+          <a:bodyPr wrap="square" anchor="t">
+            <a:spAutoFit/>
+          </a:bodyPr>
+          <a:lstStyle/>
+          <a:p>
+            <a:pPr algn="l">
+              <a:lnSpc>
+                <a:spcPct val="104000"/>
+              </a:lnSpc>
+            </a:pPr>
+            <a:r>
+              <a:rPr sz="1250" b="1">
+                <a:solidFill>
+                  <a:srgbClr val="5B6778"/>
+                </a:solidFill>
+                <a:latin typeface="Microsoft YaHei"/>
+              </a:rPr>
+              <a:t>本次 Motion SRC</a:t>
+            </a:r>
+          </a:p>
+        </p:txBody>
+      </p:sp>
+      <p:sp>
+        <p:nvSpPr>
+          <p:cNvPr id="13" name="TextBox 12"/>
+          <p:cNvSpPr txBox="1"/>
+          <p:nvPr/>
+        </p:nvSpPr>
+        <p:spPr>
+          <a:xfrm>
+            <a:off x="3511296" y="2103120"/>
+            <a:ext cx="2020824" cy="402336"/>
+          </a:xfrm>
+          <a:prstGeom prst="rect">
+            <a:avLst/>
+          </a:prstGeom>
+          <a:noFill/>
+        </p:spPr>
+        <p:txBody>
+          <a:bodyPr wrap="square" anchor="t">
+            <a:spAutoFit/>
+          </a:bodyPr>
+          <a:lstStyle/>
+          <a:p>
+            <a:pPr algn="l">
+              <a:lnSpc>
+                <a:spcPct val="104000"/>
+              </a:lnSpc>
+            </a:pPr>
+            <a:r>
+              <a:rPr sz="2600" b="1">
+                <a:solidFill>
+                  <a:srgbClr val="209760"/>
+                </a:solidFill>
+                <a:latin typeface="Microsoft YaHei"/>
+              </a:rPr>
+              <a:t>0.7661</a:t>
+            </a:r>
+          </a:p>
+        </p:txBody>
+      </p:sp>
+      <p:sp>
+        <p:nvSpPr>
+          <p:cNvPr id="14" name="TextBox 13"/>
+          <p:cNvSpPr txBox="1"/>
+          <p:nvPr/>
+        </p:nvSpPr>
+        <p:spPr>
+          <a:xfrm>
+            <a:off x="3511296" y="2487168"/>
+            <a:ext cx="2020824" cy="201168"/>
+          </a:xfrm>
+          <a:prstGeom prst="rect">
+            <a:avLst/>
+          </a:prstGeom>
+          <a:noFill/>
+        </p:spPr>
+        <p:txBody>
+          <a:bodyPr wrap="square" anchor="t">
+            <a:spAutoFit/>
+          </a:bodyPr>
+          <a:lstStyle/>
+          <a:p>
+            <a:pPr algn="l">
+              <a:lnSpc>
+                <a:spcPct val="104000"/>
+              </a:lnSpc>
+            </a:pPr>
+            <a:r>
+              <a:rPr sz="950" b="0">
+                <a:solidFill>
+                  <a:srgbClr val="5B6778"/>
+                </a:solidFill>
+                <a:latin typeface="Microsoft YaHei"/>
+              </a:rPr>
+              <a:t>independent eval</a:t>
+            </a:r>
+          </a:p>
+        </p:txBody>
+      </p:sp>
+      <p:sp>
+        <p:nvSpPr>
+          <p:cNvPr id="15" name="Rounded Rectangle 14"/>
+          <p:cNvSpPr/>
+          <p:nvPr/>
+        </p:nvSpPr>
+        <p:spPr>
+          <a:xfrm>
+            <a:off x="5934456" y="1664208"/>
+            <a:ext cx="2423160" cy="1078992"/>
+          </a:xfrm>
+          <a:prstGeom prst="roundRect">
+            <a:avLst/>
+          </a:prstGeom>
+          <a:solidFill>
+            <a:srgbClr val="FFFFFF"/>
+          </a:solidFill>
+          <a:ln w="12700">
+            <a:solidFill>
+              <a:srgbClr val="DCE4EE"/>
+            </a:solidFill>
+          </a:ln>
+        </p:spPr>
+        <p:style>
+          <a:lnRef idx="1">
+            <a:schemeClr val="accent1"/>
+          </a:lnRef>
+          <a:fillRef idx="3">
+            <a:schemeClr val="accent1"/>
+          </a:fillRef>
+          <a:effectRef idx="2">
+            <a:schemeClr val="accent1"/>
+          </a:effectRef>
+          <a:fontRef idx="minor">
+            <a:schemeClr val="lt1"/>
+          </a:fontRef>
+        </p:style>
+        <p:txBody>
+          <a:bodyPr rtlCol="0" anchor="ctr"/>
+          <a:lstStyle/>
+          <a:p>
+            <a:pPr algn="ctr"/>
+            <a:endParaRPr/>
+          </a:p>
+        </p:txBody>
+      </p:sp>
+      <p:sp>
+        <p:nvSpPr>
+          <p:cNvPr id="16" name="TextBox 15"/>
+          <p:cNvSpPr txBox="1"/>
+          <p:nvPr/>
+        </p:nvSpPr>
+        <p:spPr>
+          <a:xfrm>
+            <a:off x="6135624" y="1828800"/>
+            <a:ext cx="2020824" cy="256032"/>
+          </a:xfrm>
+          <a:prstGeom prst="rect">
+            <a:avLst/>
+          </a:prstGeom>
+          <a:noFill/>
+        </p:spPr>
+        <p:txBody>
+          <a:bodyPr wrap="square" anchor="t">
+            <a:spAutoFit/>
+          </a:bodyPr>
+          <a:lstStyle/>
+          <a:p>
+            <a:pPr algn="l">
+              <a:lnSpc>
+                <a:spcPct val="104000"/>
+              </a:lnSpc>
+            </a:pPr>
+            <a:r>
+              <a:rPr sz="1250" b="1">
+                <a:solidFill>
+                  <a:srgbClr val="5B6778"/>
+                </a:solidFill>
+                <a:latin typeface="Microsoft YaHei"/>
+              </a:rPr>
+              <a:t>差距 Δ</a:t>
+            </a:r>
+          </a:p>
+        </p:txBody>
+      </p:sp>
+      <p:sp>
+        <p:nvSpPr>
+          <p:cNvPr id="17" name="TextBox 16"/>
+          <p:cNvSpPr txBox="1"/>
+          <p:nvPr/>
+        </p:nvSpPr>
+        <p:spPr>
+          <a:xfrm>
+            <a:off x="6135624" y="2103120"/>
+            <a:ext cx="2020824" cy="402336"/>
+          </a:xfrm>
+          <a:prstGeom prst="rect">
+            <a:avLst/>
+          </a:prstGeom>
+          <a:noFill/>
+        </p:spPr>
+        <p:txBody>
+          <a:bodyPr wrap="square" anchor="t">
+            <a:spAutoFit/>
+          </a:bodyPr>
+          <a:lstStyle/>
+          <a:p>
+            <a:pPr algn="l">
+              <a:lnSpc>
+                <a:spcPct val="104000"/>
+              </a:lnSpc>
+            </a:pPr>
+            <a:r>
+              <a:rPr sz="2600" b="1">
+                <a:solidFill>
+                  <a:srgbClr val="EE8436"/>
+                </a:solidFill>
+                <a:latin typeface="Microsoft YaHei"/>
+              </a:rPr>
+              <a:t>-0.0102</a:t>
+            </a:r>
+          </a:p>
+        </p:txBody>
+      </p:sp>
+      <p:sp>
+        <p:nvSpPr>
+          <p:cNvPr id="18" name="TextBox 17"/>
+          <p:cNvSpPr txBox="1"/>
+          <p:nvPr/>
+        </p:nvSpPr>
+        <p:spPr>
+          <a:xfrm>
+            <a:off x="6135624" y="2487168"/>
+            <a:ext cx="2020824" cy="201168"/>
+          </a:xfrm>
+          <a:prstGeom prst="rect">
+            <a:avLst/>
+          </a:prstGeom>
+          <a:noFill/>
+        </p:spPr>
+        <p:txBody>
+          <a:bodyPr wrap="square" anchor="t">
+            <a:spAutoFit/>
+          </a:bodyPr>
+          <a:lstStyle/>
+          <a:p>
+            <a:pPr algn="l">
+              <a:lnSpc>
+                <a:spcPct val="104000"/>
+              </a:lnSpc>
+            </a:pPr>
+            <a:r>
+              <a:rPr sz="950" b="0">
+                <a:solidFill>
+                  <a:srgbClr val="5B6778"/>
+                </a:solidFill>
+                <a:latin typeface="Microsoft YaHei"/>
+              </a:rPr>
+              <a:t>ours - paper</a:t>
+            </a:r>
+          </a:p>
+        </p:txBody>
+      </p:sp>
+      <p:sp>
+        <p:nvSpPr>
+          <p:cNvPr id="19" name="Rounded Rectangle 18"/>
+          <p:cNvSpPr/>
+          <p:nvPr/>
+        </p:nvSpPr>
+        <p:spPr>
+          <a:xfrm>
+            <a:off x="8558784" y="1664208"/>
+            <a:ext cx="2423160" cy="1078992"/>
+          </a:xfrm>
+          <a:prstGeom prst="roundRect">
+            <a:avLst/>
+          </a:prstGeom>
+          <a:solidFill>
+            <a:srgbClr val="FFFFFF"/>
+          </a:solidFill>
+          <a:ln w="12700">
+            <a:solidFill>
+              <a:srgbClr val="DCE4EE"/>
+            </a:solidFill>
+          </a:ln>
+        </p:spPr>
+        <p:style>
+          <a:lnRef idx="1">
+            <a:schemeClr val="accent1"/>
+          </a:lnRef>
+          <a:fillRef idx="3">
+            <a:schemeClr val="accent1"/>
+          </a:fillRef>
+          <a:effectRef idx="2">
+            <a:schemeClr val="accent1"/>
+          </a:effectRef>
+          <a:fontRef idx="minor">
+            <a:schemeClr val="lt1"/>
+          </a:fontRef>
+        </p:style>
+        <p:txBody>
+          <a:bodyPr rtlCol="0" anchor="ctr"/>
+          <a:lstStyle/>
+          <a:p>
+            <a:pPr algn="ctr"/>
+            <a:endParaRPr/>
+          </a:p>
+        </p:txBody>
+      </p:sp>
+      <p:sp>
+        <p:nvSpPr>
+          <p:cNvPr id="20" name="TextBox 19"/>
+          <p:cNvSpPr txBox="1"/>
+          <p:nvPr/>
+        </p:nvSpPr>
+        <p:spPr>
+          <a:xfrm>
+            <a:off x="8759952" y="1828800"/>
+            <a:ext cx="2020824" cy="256032"/>
+          </a:xfrm>
+          <a:prstGeom prst="rect">
+            <a:avLst/>
+          </a:prstGeom>
+          <a:noFill/>
+        </p:spPr>
+        <p:txBody>
+          <a:bodyPr wrap="square" anchor="t">
+            <a:spAutoFit/>
+          </a:bodyPr>
+          <a:lstStyle/>
+          <a:p>
+            <a:pPr algn="l">
+              <a:lnSpc>
+                <a:spcPct val="104000"/>
+              </a:lnSpc>
+            </a:pPr>
+            <a:r>
+              <a:rPr sz="1250" b="1">
+                <a:solidFill>
+                  <a:srgbClr val="5B6778"/>
+                </a:solidFill>
+                <a:latin typeface="Microsoft YaHei"/>
+              </a:rPr>
+              <a:t>Pose mean F1</a:t>
+            </a:r>
+          </a:p>
+        </p:txBody>
+      </p:sp>
+      <p:sp>
+        <p:nvSpPr>
+          <p:cNvPr id="21" name="TextBox 20"/>
+          <p:cNvSpPr txBox="1"/>
+          <p:nvPr/>
+        </p:nvSpPr>
+        <p:spPr>
+          <a:xfrm>
+            <a:off x="8759952" y="2103120"/>
+            <a:ext cx="2020824" cy="402336"/>
+          </a:xfrm>
+          <a:prstGeom prst="rect">
+            <a:avLst/>
+          </a:prstGeom>
+          <a:noFill/>
+        </p:spPr>
+        <p:txBody>
+          <a:bodyPr wrap="square" anchor="t">
+            <a:spAutoFit/>
+          </a:bodyPr>
+          <a:lstStyle/>
+          <a:p>
+            <a:pPr algn="l">
+              <a:lnSpc>
+                <a:spcPct val="104000"/>
+              </a:lnSpc>
+            </a:pPr>
+            <a:r>
+              <a:rPr sz="2600" b="1">
+                <a:solidFill>
+                  <a:srgbClr val="CF4B4B"/>
+                </a:solidFill>
+                <a:latin typeface="Microsoft YaHei"/>
+              </a:rPr>
+              <a:t>0.4052</a:t>
+            </a:r>
+          </a:p>
+        </p:txBody>
+      </p:sp>
+      <p:sp>
+        <p:nvSpPr>
+          <p:cNvPr id="22" name="TextBox 21"/>
+          <p:cNvSpPr txBox="1"/>
+          <p:nvPr/>
+        </p:nvSpPr>
+        <p:spPr>
+          <a:xfrm>
+            <a:off x="8759952" y="2487168"/>
+            <a:ext cx="2020824" cy="201168"/>
+          </a:xfrm>
+          <a:prstGeom prst="rect">
+            <a:avLst/>
+          </a:prstGeom>
+          <a:noFill/>
+        </p:spPr>
+        <p:txBody>
+          <a:bodyPr wrap="square" anchor="t">
+            <a:spAutoFit/>
+          </a:bodyPr>
+          <a:lstStyle/>
+          <a:p>
+            <a:pPr algn="l">
+              <a:lnSpc>
+                <a:spcPct val="104000"/>
+              </a:lnSpc>
+            </a:pPr>
+            <a:r>
+              <a:rPr sz="950" b="0">
+                <a:solidFill>
+                  <a:srgbClr val="5B6778"/>
+                </a:solidFill>
+                <a:latin typeface="Microsoft YaHei"/>
+              </a:rPr>
+              <a:t>非严格同口径</a:t>
+            </a:r>
+          </a:p>
+        </p:txBody>
+      </p:sp>
+      <p:graphicFrame>
+        <p:nvGraphicFramePr>
+          <p:cNvPr id="23" name="Table 22"/>
+          <p:cNvGraphicFramePr>
+            <a:graphicFrameLocks noGrp="1"/>
+          </p:cNvGraphicFramePr>
+          <p:nvPr/>
+        </p:nvGraphicFramePr>
+        <p:xfrm>
+          <a:off x="685800" y="2999232"/>
+          <a:ext cx="6629400" cy="1691640"/>
+        </p:xfrm>
+        <a:graphic>
+          <a:graphicData uri="http://schemas.openxmlformats.org/drawingml/2006/table">
+            <a:tbl>
+              <a:tblPr firstRow="1" bandRow="1">
+                <a:tableStyleId>{5C22544A-7EE6-4342-B048-85BDC9FD1C3A}</a:tableStyleId>
+              </a:tblPr>
+              <a:tblGrid>
+                <a:gridCol w="1508760">
+                  <a:extLst>
+                    <a:ext uri="{9D8B030D-6E8A-4147-A177-3AD203B41FA5}">
+                      <a16:colId xmlns:a16="http://schemas.microsoft.com/office/drawing/2014/main" val="20000"/>
+                    </a:ext>
+                  </a:extLst>
+                </a:gridCol>
+                <a:gridCol w="685800">
+                  <a:extLst>
+                    <a:ext uri="{9D8B030D-6E8A-4147-A177-3AD203B41FA5}">
+                      <a16:colId xmlns:a16="http://schemas.microsoft.com/office/drawing/2014/main" val="20001"/>
+                    </a:ext>
+                  </a:extLst>
+                </a:gridCol>
+                <a:gridCol w="868680">
+                  <a:extLst>
+                    <a:ext uri="{9D8B030D-6E8A-4147-A177-3AD203B41FA5}">
+                      <a16:colId xmlns:a16="http://schemas.microsoft.com/office/drawing/2014/main" val="20002"/>
+                    </a:ext>
+                  </a:extLst>
+                </a:gridCol>
+                <a:gridCol w="868680">
+                  <a:extLst>
+                    <a:ext uri="{9D8B030D-6E8A-4147-A177-3AD203B41FA5}">
+                      <a16:colId xmlns:a16="http://schemas.microsoft.com/office/drawing/2014/main" val="20003"/>
+                    </a:ext>
+                  </a:extLst>
+                </a:gridCol>
+                <a:gridCol w="777240">
+                  <a:extLst>
+                    <a:ext uri="{9D8B030D-6E8A-4147-A177-3AD203B41FA5}">
+                      <a16:colId xmlns:a16="http://schemas.microsoft.com/office/drawing/2014/main" val="20004"/>
+                    </a:ext>
+                  </a:extLst>
+                </a:gridCol>
+                <a:gridCol w="1920240">
+                  <a:extLst>
+                    <a:ext uri="{9D8B030D-6E8A-4147-A177-3AD203B41FA5}">
+                      <a16:colId xmlns:a16="http://schemas.microsoft.com/office/drawing/2014/main" val="20005"/>
+                    </a:ext>
+                  </a:extLst>
+                </a:gridCol>
+              </a:tblGrid>
+              <a:tr h="563880">
+                <a:tc>
+                  <a:txBody>
+                    <a:bodyPr/>
+                    <a:lstStyle/>
+                    <a:p>
+                      <a:pPr algn="ctr">
+                        <a:defRPr sz="1000" b="1">
+                          <a:solidFill>
+                            <a:srgbClr val="FFFFFF"/>
+                          </a:solidFill>
+                          <a:latin typeface="Microsoft YaHei"/>
+                        </a:defRPr>
+                      </a:pPr>
+                      <a:r>
+                        <a:t>对象</a:t>
+                      </a:r>
+                    </a:p>
+                  </a:txBody>
+                  <a:tcPr>
+                    <a:solidFill>
+                      <a:srgbClr val="12264A"/>
+                    </a:solidFill>
+                  </a:tcPr>
+                </a:tc>
+                <a:tc>
+                  <a:txBody>
+                    <a:bodyPr/>
+                    <a:lstStyle/>
+                    <a:p>
+                      <a:pPr algn="ctr">
+                        <a:defRPr sz="1000" b="1">
+                          <a:solidFill>
+                            <a:srgbClr val="FFFFFF"/>
+                          </a:solidFill>
+                          <a:latin typeface="Microsoft YaHei"/>
+                        </a:defRPr>
+                      </a:pPr>
+                      <a:r>
+                        <a:t>指标</a:t>
+                      </a:r>
+                    </a:p>
+                  </a:txBody>
+                  <a:tcPr>
+                    <a:solidFill>
+                      <a:srgbClr val="12264A"/>
+                    </a:solidFill>
+                  </a:tcPr>
+                </a:tc>
+                <a:tc>
+                  <a:txBody>
+                    <a:bodyPr/>
+                    <a:lstStyle/>
+                    <a:p>
+                      <a:pPr algn="ctr">
+                        <a:defRPr sz="1000" b="1">
+                          <a:solidFill>
+                            <a:srgbClr val="FFFFFF"/>
+                          </a:solidFill>
+                          <a:latin typeface="Microsoft YaHei"/>
+                        </a:defRPr>
+                      </a:pPr>
+                      <a:r>
+                        <a:t>论文/记录</a:t>
+                      </a:r>
+                    </a:p>
+                  </a:txBody>
+                  <a:tcPr>
+                    <a:solidFill>
+                      <a:srgbClr val="12264A"/>
+                    </a:solidFill>
+                  </a:tcPr>
+                </a:tc>
+                <a:tc>
+                  <a:txBody>
+                    <a:bodyPr/>
+                    <a:lstStyle/>
+                    <a:p>
+                      <a:pPr algn="ctr">
+                        <a:defRPr sz="1000" b="1">
+                          <a:solidFill>
+                            <a:srgbClr val="FFFFFF"/>
+                          </a:solidFill>
+                          <a:latin typeface="Microsoft YaHei"/>
+                        </a:defRPr>
+                      </a:pPr>
+                      <a:r>
+                        <a:t>本次复现</a:t>
+                      </a:r>
+                    </a:p>
+                  </a:txBody>
+                  <a:tcPr>
+                    <a:solidFill>
+                      <a:srgbClr val="12264A"/>
+                    </a:solidFill>
+                  </a:tcPr>
+                </a:tc>
+                <a:tc>
+                  <a:txBody>
+                    <a:bodyPr/>
+                    <a:lstStyle/>
+                    <a:p>
+                      <a:pPr algn="ctr">
+                        <a:defRPr sz="1000" b="1">
+                          <a:solidFill>
+                            <a:srgbClr val="FFFFFF"/>
+                          </a:solidFill>
+                          <a:latin typeface="Microsoft YaHei"/>
+                        </a:defRPr>
+                      </a:pPr>
+                      <a:r>
+                        <a:t>Δ</a:t>
+                      </a:r>
+                    </a:p>
+                  </a:txBody>
+                  <a:tcPr>
+                    <a:solidFill>
+                      <a:srgbClr val="12264A"/>
+                    </a:solidFill>
+                  </a:tcPr>
+                </a:tc>
+                <a:tc>
+                  <a:txBody>
+                    <a:bodyPr/>
+                    <a:lstStyle/>
+                    <a:p>
+                      <a:pPr algn="ctr">
+                        <a:defRPr sz="1000" b="1">
+                          <a:solidFill>
+                            <a:srgbClr val="FFFFFF"/>
+                          </a:solidFill>
+                          <a:latin typeface="Microsoft YaHei"/>
+                        </a:defRPr>
+                      </a:pPr>
+                      <a:r>
+                        <a:t>可比性说明</a:t>
+                      </a:r>
+                    </a:p>
+                  </a:txBody>
+                  <a:tcPr>
+                    <a:solidFill>
+                      <a:srgbClr val="12264A"/>
+                    </a:solidFill>
+                  </a:tcPr>
+                </a:tc>
+                <a:extLst>
+                  <a:ext uri="{0D108BD9-81ED-4DB2-BD59-A6C34878D82A}">
+                    <a16:rowId xmlns:a16="http://schemas.microsoft.com/office/drawing/2014/main" val="10000"/>
+                  </a:ext>
+                </a:extLst>
+              </a:tr>
+              <a:tr h="563880">
+                <a:tc>
+                  <a:txBody>
+                    <a:bodyPr/>
+                    <a:lstStyle/>
+                    <a:p>
+                      <a:pPr algn="l">
+                        <a:defRPr sz="950">
+                          <a:solidFill>
+                            <a:srgbClr val="1C2430"/>
+                          </a:solidFill>
+                          <a:latin typeface="Microsoft YaHei"/>
+                        </a:defRPr>
+                      </a:pPr>
+                      <a:r>
+                        <a:t>Motion Disentangling</a:t>
+                      </a:r>
+                    </a:p>
+                  </a:txBody>
+                  <a:tcPr/>
+                </a:tc>
+                <a:tc>
+                  <a:txBody>
+                    <a:bodyPr/>
+                    <a:lstStyle/>
+                    <a:p>
+                      <a:pPr algn="ctr">
+                        <a:defRPr sz="950">
+                          <a:solidFill>
+                            <a:srgbClr val="1C2430"/>
+                          </a:solidFill>
+                          <a:latin typeface="Microsoft YaHei"/>
+                        </a:defRPr>
+                      </a:pPr>
+                      <a:r>
+                        <a:t>SRC</a:t>
+                      </a:r>
+                    </a:p>
+                  </a:txBody>
+                  <a:tcPr/>
+                </a:tc>
+                <a:tc>
+                  <a:txBody>
+                    <a:bodyPr/>
+                    <a:lstStyle/>
+                    <a:p>
+                      <a:pPr algn="ctr">
+                        <a:defRPr sz="950">
+                          <a:solidFill>
+                            <a:srgbClr val="1C2430"/>
+                          </a:solidFill>
+                          <a:latin typeface="Microsoft YaHei"/>
+                        </a:defRPr>
+                      </a:pPr>
+                      <a:r>
+                        <a:t>0.7763</a:t>
+                      </a:r>
+                    </a:p>
+                  </a:txBody>
+                  <a:tcPr/>
+                </a:tc>
+                <a:tc>
+                  <a:txBody>
+                    <a:bodyPr/>
+                    <a:lstStyle/>
+                    <a:p>
+                      <a:pPr algn="ctr">
+                        <a:defRPr sz="950">
+                          <a:solidFill>
+                            <a:srgbClr val="1C2430"/>
+                          </a:solidFill>
+                          <a:latin typeface="Microsoft YaHei"/>
+                        </a:defRPr>
+                      </a:pPr>
+                      <a:r>
+                        <a:t>0.7661</a:t>
+                      </a:r>
+                    </a:p>
+                  </a:txBody>
+                  <a:tcPr/>
+                </a:tc>
+                <a:tc>
+                  <a:txBody>
+                    <a:bodyPr/>
+                    <a:lstStyle/>
+                    <a:p>
+                      <a:pPr algn="ctr">
+                        <a:defRPr sz="950">
+                          <a:solidFill>
+                            <a:srgbClr val="EE8436"/>
+                          </a:solidFill>
+                          <a:latin typeface="Microsoft YaHei"/>
+                        </a:defRPr>
+                      </a:pPr>
+                      <a:r>
+                        <a:t>-0.0102</a:t>
+                      </a:r>
+                    </a:p>
+                  </a:txBody>
+                  <a:tcPr/>
+                </a:tc>
+                <a:tc>
+                  <a:txBody>
+                    <a:bodyPr/>
+                    <a:lstStyle/>
+                    <a:p>
+                      <a:pPr algn="l">
+                        <a:defRPr sz="850">
+                          <a:solidFill>
+                            <a:srgbClr val="1C2430"/>
+                          </a:solidFill>
+                          <a:latin typeface="Microsoft YaHei"/>
+                        </a:defRPr>
+                      </a:pPr>
+                      <a:r>
+                        <a:t>同为 MTL-AQA 质量回归，较可比</a:t>
+                      </a:r>
+                    </a:p>
+                  </a:txBody>
+                  <a:tcPr/>
+                </a:tc>
+                <a:extLst>
+                  <a:ext uri="{0D108BD9-81ED-4DB2-BD59-A6C34878D82A}">
+                    <a16:rowId xmlns:a16="http://schemas.microsoft.com/office/drawing/2014/main" val="10001"/>
+                  </a:ext>
+                </a:extLst>
+              </a:tr>
+              <a:tr h="563880">
+                <a:tc>
+                  <a:txBody>
+                    <a:bodyPr/>
+                    <a:lstStyle/>
+                    <a:p>
+                      <a:pPr algn="l">
+                        <a:defRPr sz="950">
+                          <a:solidFill>
+                            <a:srgbClr val="1C2430"/>
+                          </a:solidFill>
+                          <a:latin typeface="Microsoft YaHei"/>
+                        </a:defRPr>
+                      </a:pPr>
+                      <a:r>
+                        <a:t>Pose Contrastive</a:t>
+                      </a:r>
+                    </a:p>
+                  </a:txBody>
+                  <a:tcPr/>
+                </a:tc>
+                <a:tc>
+                  <a:txBody>
+                    <a:bodyPr/>
+                    <a:lstStyle/>
+                    <a:p>
+                      <a:pPr algn="ctr">
+                        <a:defRPr sz="950">
+                          <a:solidFill>
+                            <a:srgbClr val="1C2430"/>
+                          </a:solidFill>
+                          <a:latin typeface="Microsoft YaHei"/>
+                        </a:defRPr>
+                      </a:pPr>
+                      <a:r>
+                        <a:t>F1</a:t>
+                      </a:r>
+                    </a:p>
+                  </a:txBody>
+                  <a:tcPr/>
+                </a:tc>
+                <a:tc>
+                  <a:txBody>
+                    <a:bodyPr/>
+                    <a:lstStyle/>
+                    <a:p>
+                      <a:pPr algn="ctr">
+                        <a:defRPr sz="950">
+                          <a:solidFill>
+                            <a:srgbClr val="1C2430"/>
+                          </a:solidFill>
+                          <a:latin typeface="Microsoft YaHei"/>
+                        </a:defRPr>
+                      </a:pPr>
+                      <a:r>
+                        <a:t>0.7763</a:t>
+                      </a:r>
+                    </a:p>
+                  </a:txBody>
+                  <a:tcPr/>
+                </a:tc>
+                <a:tc>
+                  <a:txBody>
+                    <a:bodyPr/>
+                    <a:lstStyle/>
+                    <a:p>
+                      <a:pPr algn="ctr">
+                        <a:defRPr sz="950">
+                          <a:solidFill>
+                            <a:srgbClr val="1C2430"/>
+                          </a:solidFill>
+                          <a:latin typeface="Microsoft YaHei"/>
+                        </a:defRPr>
+                      </a:pPr>
+                      <a:r>
+                        <a:t>0.4052</a:t>
+                      </a:r>
+                    </a:p>
+                  </a:txBody>
+                  <a:tcPr/>
+                </a:tc>
+                <a:tc>
+                  <a:txBody>
+                    <a:bodyPr/>
+                    <a:lstStyle/>
+                    <a:p>
+                      <a:pPr algn="ctr">
+                        <a:defRPr sz="950">
+                          <a:solidFill>
+                            <a:srgbClr val="CF4B4B"/>
+                          </a:solidFill>
+                          <a:latin typeface="Microsoft YaHei"/>
+                        </a:defRPr>
+                      </a:pPr>
+                      <a:r>
+                        <a:t>-0.3711</a:t>
+                      </a:r>
+                    </a:p>
+                  </a:txBody>
+                  <a:tcPr/>
+                </a:tc>
+                <a:tc>
+                  <a:txBody>
+                    <a:bodyPr/>
+                    <a:lstStyle/>
+                    <a:p>
+                      <a:pPr algn="l">
+                        <a:defRPr sz="850">
+                          <a:solidFill>
+                            <a:srgbClr val="1C2430"/>
+                          </a:solidFill>
+                          <a:latin typeface="Microsoft YaHei"/>
+                        </a:defRPr>
+                      </a:pPr>
+                      <a:r>
+                        <a:t>论文/综述口径与本次五类属性 F1 不完全一致</a:t>
+                      </a:r>
+                    </a:p>
+                  </a:txBody>
+                  <a:tcPr/>
+                </a:tc>
+                <a:extLst>
+                  <a:ext uri="{0D108BD9-81ED-4DB2-BD59-A6C34878D82A}">
+                    <a16:rowId xmlns:a16="http://schemas.microsoft.com/office/drawing/2014/main" val="10002"/>
+                  </a:ext>
+                </a:extLst>
+              </a:tr>
+            </a:tbl>
+          </a:graphicData>
+        </a:graphic>
+      </p:graphicFrame>
+      <p:graphicFrame>
+        <p:nvGraphicFramePr>
+          <p:cNvPr id="24" name="Chart 23"/>
+          <p:cNvGraphicFramePr>
+            <a:graphicFrameLocks noGrp="1"/>
+          </p:cNvGraphicFramePr>
+          <p:nvPr>
+            <p:extLst>
+              <p:ext uri="{D42A27DB-BD31-4B8C-83A1-F6EECF244321}">
+                <p14:modId xmlns:p14="http://schemas.microsoft.com/office/powerpoint/2010/main" val="3618655645"/>
+              </p:ext>
+            </p:extLst>
+          </p:nvPr>
+        </p:nvGraphicFramePr>
+        <p:xfrm>
+          <a:off x="7726679" y="2852928"/>
+          <a:ext cx="3703320" cy="2057400"/>
+        </p:xfrm>
+        <a:graphic>
+          <a:graphicData uri="http://schemas.openxmlformats.org/drawingml/2006/chart">
+            <c:chart xmlns:c="http://schemas.openxmlformats.org/drawingml/2006/chart" xmlns:r="http://schemas.openxmlformats.org/officeDocument/2006/relationships" r:id="rId2"/>
+          </a:graphicData>
+        </a:graphic>
+      </p:graphicFrame>
+      <p:sp>
+        <p:nvSpPr>
+          <p:cNvPr id="25" name="TextBox 24"/>
+          <p:cNvSpPr txBox="1"/>
+          <p:nvPr/>
+        </p:nvSpPr>
+        <p:spPr>
+          <a:xfrm>
+            <a:off x="731520" y="4804979"/>
+            <a:ext cx="2926080" cy="310896"/>
+          </a:xfrm>
+          <a:prstGeom prst="rect">
+            <a:avLst/>
+          </a:prstGeom>
+          <a:noFill/>
+        </p:spPr>
+        <p:txBody>
+          <a:bodyPr wrap="square" anchor="t">
+            <a:spAutoFit/>
+          </a:bodyPr>
+          <a:lstStyle/>
+          <a:p>
+            <a:pPr algn="l">
+              <a:lnSpc>
+                <a:spcPct val="104000"/>
+              </a:lnSpc>
+            </a:pPr>
+            <a:r>
+              <a:rPr sz="1800" b="1" dirty="0" err="1">
+                <a:solidFill>
+                  <a:srgbClr val="12264A"/>
+                </a:solidFill>
+                <a:latin typeface="Microsoft YaHei"/>
+              </a:rPr>
+              <a:t>差距主要来自三点</a:t>
+            </a:r>
+            <a:endParaRPr sz="1800" b="1" dirty="0">
+              <a:solidFill>
+                <a:srgbClr val="12264A"/>
+              </a:solidFill>
+              <a:latin typeface="Microsoft YaHei"/>
+            </a:endParaRPr>
+          </a:p>
+        </p:txBody>
+      </p:sp>
+      <p:sp>
+        <p:nvSpPr>
+          <p:cNvPr id="26" name="Rounded Rectangle 25"/>
+          <p:cNvSpPr/>
+          <p:nvPr/>
+        </p:nvSpPr>
+        <p:spPr>
+          <a:xfrm>
+            <a:off x="731520" y="5170739"/>
+            <a:ext cx="3154680" cy="1025042"/>
+          </a:xfrm>
+          <a:prstGeom prst="roundRect">
+            <a:avLst/>
+          </a:prstGeom>
+          <a:solidFill>
+            <a:srgbClr val="FFFFFF"/>
+          </a:solidFill>
+          <a:ln w="12700">
+            <a:solidFill>
+              <a:srgbClr val="DCE4EE"/>
+            </a:solidFill>
+          </a:ln>
+        </p:spPr>
+        <p:style>
+          <a:lnRef idx="1">
+            <a:schemeClr val="accent1"/>
+          </a:lnRef>
+          <a:fillRef idx="3">
+            <a:schemeClr val="accent1"/>
+          </a:fillRef>
+          <a:effectRef idx="2">
+            <a:schemeClr val="accent1"/>
+          </a:effectRef>
+          <a:fontRef idx="minor">
+            <a:schemeClr val="lt1"/>
+          </a:fontRef>
+        </p:style>
+        <p:txBody>
+          <a:bodyPr rtlCol="0" anchor="ctr"/>
+          <a:lstStyle/>
+          <a:p>
+            <a:pPr algn="ctr"/>
+            <a:endParaRPr/>
+          </a:p>
+        </p:txBody>
+      </p:sp>
+      <p:sp>
+        <p:nvSpPr>
+          <p:cNvPr id="27" name="TextBox 26"/>
+          <p:cNvSpPr txBox="1"/>
+          <p:nvPr/>
+        </p:nvSpPr>
+        <p:spPr>
+          <a:xfrm>
+            <a:off x="932688" y="5335331"/>
+            <a:ext cx="2752344" cy="310896"/>
+          </a:xfrm>
+          <a:prstGeom prst="rect">
+            <a:avLst/>
+          </a:prstGeom>
+          <a:noFill/>
+        </p:spPr>
+        <p:txBody>
+          <a:bodyPr wrap="square" anchor="t">
+            <a:spAutoFit/>
+          </a:bodyPr>
+          <a:lstStyle/>
+          <a:p>
+            <a:pPr algn="l">
+              <a:lnSpc>
+                <a:spcPct val="104000"/>
+              </a:lnSpc>
+            </a:pPr>
+            <a:r>
+              <a:rPr sz="1600" b="1">
+                <a:solidFill>
+                  <a:srgbClr val="12264A"/>
+                </a:solidFill>
+                <a:latin typeface="Microsoft YaHei"/>
+              </a:rPr>
+              <a:t>特征不一致</a:t>
+            </a:r>
+          </a:p>
+        </p:txBody>
+      </p:sp>
+      <p:sp>
+        <p:nvSpPr>
+          <p:cNvPr id="28" name="TextBox 27"/>
+          <p:cNvSpPr txBox="1"/>
+          <p:nvPr/>
+        </p:nvSpPr>
+        <p:spPr>
+          <a:xfrm>
+            <a:off x="932688" y="5701091"/>
+            <a:ext cx="2752344" cy="228600"/>
+          </a:xfrm>
+          <a:prstGeom prst="rect">
+            <a:avLst/>
+          </a:prstGeom>
+          <a:noFill/>
+        </p:spPr>
+        <p:txBody>
+          <a:bodyPr wrap="square" anchor="t">
+            <a:spAutoFit/>
+          </a:bodyPr>
+          <a:lstStyle/>
+          <a:p>
+            <a:pPr algn="l">
+              <a:lnSpc>
+                <a:spcPct val="104000"/>
+              </a:lnSpc>
+            </a:pPr>
+            <a:r>
+              <a:rPr sz="1050" b="0">
+                <a:solidFill>
+                  <a:srgbClr val="1C2430"/>
+                </a:solidFill>
+                <a:latin typeface="Microsoft YaHei"/>
+              </a:rPr>
+              <a:t>论文依赖视频/姿态特征与预训练；本次使用真实抽帧的轻量统计特征。</a:t>
+            </a:r>
+          </a:p>
+        </p:txBody>
+      </p:sp>
+      <p:sp>
+        <p:nvSpPr>
+          <p:cNvPr id="29" name="Rounded Rectangle 28"/>
+          <p:cNvSpPr/>
+          <p:nvPr/>
+        </p:nvSpPr>
+        <p:spPr>
+          <a:xfrm>
+            <a:off x="4160520" y="5170739"/>
+            <a:ext cx="3154680" cy="1025042"/>
+          </a:xfrm>
+          <a:prstGeom prst="roundRect">
+            <a:avLst/>
+          </a:prstGeom>
+          <a:solidFill>
+            <a:srgbClr val="FFFFFF"/>
+          </a:solidFill>
+          <a:ln w="12700">
+            <a:solidFill>
+              <a:srgbClr val="DCE4EE"/>
+            </a:solidFill>
+          </a:ln>
+        </p:spPr>
+        <p:style>
+          <a:lnRef idx="1">
+            <a:schemeClr val="accent1"/>
+          </a:lnRef>
+          <a:fillRef idx="3">
+            <a:schemeClr val="accent1"/>
+          </a:fillRef>
+          <a:effectRef idx="2">
+            <a:schemeClr val="accent1"/>
+          </a:effectRef>
+          <a:fontRef idx="minor">
+            <a:schemeClr val="lt1"/>
+          </a:fontRef>
+        </p:style>
+        <p:txBody>
+          <a:bodyPr rtlCol="0" anchor="ctr"/>
+          <a:lstStyle/>
+          <a:p>
+            <a:pPr algn="ctr"/>
+            <a:endParaRPr/>
+          </a:p>
+        </p:txBody>
+      </p:sp>
+      <p:sp>
+        <p:nvSpPr>
+          <p:cNvPr id="30" name="TextBox 29"/>
+          <p:cNvSpPr txBox="1"/>
+          <p:nvPr/>
+        </p:nvSpPr>
+        <p:spPr>
+          <a:xfrm>
+            <a:off x="4361688" y="5335331"/>
+            <a:ext cx="2752344" cy="310896"/>
+          </a:xfrm>
+          <a:prstGeom prst="rect">
+            <a:avLst/>
+          </a:prstGeom>
+          <a:noFill/>
+        </p:spPr>
+        <p:txBody>
+          <a:bodyPr wrap="square" anchor="t">
+            <a:spAutoFit/>
+          </a:bodyPr>
+          <a:lstStyle/>
+          <a:p>
+            <a:pPr algn="l">
+              <a:lnSpc>
+                <a:spcPct val="104000"/>
+              </a:lnSpc>
+            </a:pPr>
+            <a:r>
+              <a:rPr sz="1600" b="1">
+                <a:solidFill>
+                  <a:srgbClr val="12264A"/>
+                </a:solidFill>
+                <a:latin typeface="Microsoft YaHei"/>
+              </a:rPr>
+              <a:t>公开仓库不完整</a:t>
+            </a:r>
+          </a:p>
+        </p:txBody>
+      </p:sp>
+      <p:sp>
+        <p:nvSpPr>
+          <p:cNvPr id="31" name="TextBox 30"/>
+          <p:cNvSpPr txBox="1"/>
+          <p:nvPr/>
+        </p:nvSpPr>
+        <p:spPr>
+          <a:xfrm>
+            <a:off x="4361688" y="5701091"/>
+            <a:ext cx="2752344" cy="228600"/>
+          </a:xfrm>
+          <a:prstGeom prst="rect">
+            <a:avLst/>
+          </a:prstGeom>
+          <a:noFill/>
+        </p:spPr>
+        <p:txBody>
+          <a:bodyPr wrap="square" anchor="t">
+            <a:spAutoFit/>
+          </a:bodyPr>
+          <a:lstStyle/>
+          <a:p>
+            <a:pPr algn="l">
+              <a:lnSpc>
+                <a:spcPct val="104000"/>
+              </a:lnSpc>
+            </a:pPr>
+            <a:r>
+              <a:rPr sz="1050" b="0">
+                <a:solidFill>
+                  <a:srgbClr val="1C2430"/>
+                </a:solidFill>
+                <a:latin typeface="Microsoft YaHei"/>
+              </a:rPr>
+              <a:t>官方公开代码缺少可直接迁移到 MTL-AQA 的完整训练闭环。</a:t>
+            </a:r>
+          </a:p>
+        </p:txBody>
+      </p:sp>
+      <p:sp>
+        <p:nvSpPr>
+          <p:cNvPr id="32" name="Rounded Rectangle 31"/>
+          <p:cNvSpPr/>
+          <p:nvPr/>
+        </p:nvSpPr>
+        <p:spPr>
+          <a:xfrm>
+            <a:off x="7589520" y="5170739"/>
+            <a:ext cx="3611880" cy="1025042"/>
+          </a:xfrm>
+          <a:prstGeom prst="roundRect">
+            <a:avLst/>
+          </a:prstGeom>
+          <a:solidFill>
+            <a:srgbClr val="FFFFFF"/>
+          </a:solidFill>
+          <a:ln w="12700">
+            <a:solidFill>
+              <a:srgbClr val="DCE4EE"/>
+            </a:solidFill>
+          </a:ln>
+        </p:spPr>
+        <p:style>
+          <a:lnRef idx="1">
+            <a:schemeClr val="accent1"/>
+          </a:lnRef>
+          <a:fillRef idx="3">
+            <a:schemeClr val="accent1"/>
+          </a:fillRef>
+          <a:effectRef idx="2">
+            <a:schemeClr val="accent1"/>
+          </a:effectRef>
+          <a:fontRef idx="minor">
+            <a:schemeClr val="lt1"/>
+          </a:fontRef>
+        </p:style>
+        <p:txBody>
+          <a:bodyPr rtlCol="0" anchor="ctr"/>
+          <a:lstStyle/>
+          <a:p>
+            <a:pPr algn="ctr"/>
+            <a:endParaRPr/>
+          </a:p>
+        </p:txBody>
+      </p:sp>
+      <p:sp>
+        <p:nvSpPr>
+          <p:cNvPr id="33" name="TextBox 32"/>
+          <p:cNvSpPr txBox="1"/>
+          <p:nvPr/>
+        </p:nvSpPr>
+        <p:spPr>
+          <a:xfrm>
+            <a:off x="7790688" y="5335331"/>
+            <a:ext cx="3209544" cy="310896"/>
+          </a:xfrm>
+          <a:prstGeom prst="rect">
+            <a:avLst/>
+          </a:prstGeom>
+          <a:noFill/>
+        </p:spPr>
+        <p:txBody>
+          <a:bodyPr wrap="square" anchor="t">
+            <a:spAutoFit/>
+          </a:bodyPr>
+          <a:lstStyle/>
+          <a:p>
+            <a:pPr algn="l">
+              <a:lnSpc>
+                <a:spcPct val="104000"/>
+              </a:lnSpc>
+            </a:pPr>
+            <a:r>
+              <a:rPr sz="1600" b="1">
+                <a:solidFill>
+                  <a:srgbClr val="12264A"/>
+                </a:solidFill>
+                <a:latin typeface="Microsoft YaHei"/>
+              </a:rPr>
+              <a:t>Pose 指标口径差异</a:t>
+            </a:r>
+          </a:p>
+        </p:txBody>
+      </p:sp>
+      <p:sp>
+        <p:nvSpPr>
+          <p:cNvPr id="34" name="TextBox 33"/>
+          <p:cNvSpPr txBox="1"/>
+          <p:nvPr/>
+        </p:nvSpPr>
+        <p:spPr>
+          <a:xfrm>
+            <a:off x="7790688" y="5701091"/>
+            <a:ext cx="3209544" cy="228600"/>
+          </a:xfrm>
+          <a:prstGeom prst="rect">
+            <a:avLst/>
+          </a:prstGeom>
+          <a:noFill/>
+        </p:spPr>
+        <p:txBody>
+          <a:bodyPr wrap="square" anchor="t">
+            <a:spAutoFit/>
+          </a:bodyPr>
+          <a:lstStyle/>
+          <a:p>
+            <a:pPr algn="l">
+              <a:lnSpc>
+                <a:spcPct val="104000"/>
+              </a:lnSpc>
+            </a:pPr>
+            <a:r>
+              <a:rPr sz="1050" b="0">
+                <a:solidFill>
+                  <a:srgbClr val="1C2430"/>
+                </a:solidFill>
+                <a:latin typeface="Microsoft YaHei"/>
+              </a:rPr>
+              <a:t>本次 F1 是 MTL-AQA 五类动作属性平均，和论文错误检测 F-score 不能直接等价。</a:t>
+            </a:r>
+          </a:p>
+        </p:txBody>
+      </p:sp>
+      <p:sp>
+        <p:nvSpPr>
+          <p:cNvPr id="35" name="TextBox 34"/>
+          <p:cNvSpPr txBox="1"/>
+          <p:nvPr/>
+        </p:nvSpPr>
+        <p:spPr>
+          <a:xfrm>
+            <a:off x="731520" y="6355080"/>
+            <a:ext cx="10241280" cy="201168"/>
+          </a:xfrm>
+          <a:prstGeom prst="rect">
+            <a:avLst/>
+          </a:prstGeom>
+          <a:noFill/>
+        </p:spPr>
+        <p:txBody>
+          <a:bodyPr wrap="square" anchor="t">
+            <a:spAutoFit/>
+          </a:bodyPr>
+          <a:lstStyle/>
+          <a:p>
+            <a:pPr algn="l">
+              <a:lnSpc>
+                <a:spcPct val="104000"/>
+              </a:lnSpc>
+            </a:pPr>
+            <a:r>
+              <a:rPr sz="1050" b="0">
+                <a:solidFill>
+                  <a:srgbClr val="5B6778"/>
+                </a:solidFill>
+                <a:latin typeface="Microsoft YaHei"/>
+              </a:rPr>
+              <a:t>来源：Fitness-AQA/ECCV 2022 与 AQA 综述记录 Motion Disentangling 在 MTL-AQA 上 SRC=0.7763；本次结果来自 outputs/metrics/*.json。</a:t>
+            </a:r>
+          </a:p>
+        </p:txBody>
+      </p:sp>
+      <p:sp>
+        <p:nvSpPr>
+          <p:cNvPr id="36" name="TextBox 35"/>
+          <p:cNvSpPr txBox="1"/>
+          <p:nvPr/>
+        </p:nvSpPr>
+        <p:spPr>
+          <a:xfrm>
+            <a:off x="9601200" y="6446520"/>
+            <a:ext cx="2194560" cy="219456"/>
+          </a:xfrm>
+          <a:prstGeom prst="rect">
+            <a:avLst/>
+          </a:prstGeom>
+          <a:noFill/>
+        </p:spPr>
+        <p:txBody>
+          <a:bodyPr wrap="square" anchor="t">
+            <a:spAutoFit/>
+          </a:bodyPr>
+          <a:lstStyle/>
+          <a:p>
+            <a:pPr algn="r">
+              <a:lnSpc>
+                <a:spcPct val="104000"/>
+              </a:lnSpc>
+            </a:pPr>
+            <a:r>
+              <a:rPr sz="1050" b="0">
+                <a:solidFill>
+                  <a:srgbClr val="828C9B"/>
+                </a:solidFill>
+                <a:latin typeface="Microsoft YaHei"/>
+              </a:rPr>
+              <a:t>MTL-AQA × Fitness-AQA 适配复现 | 13</a:t>
+            </a:r>
+          </a:p>
+        </p:txBody>
+      </p:sp>
+    </p:spTree>
+  </p:cSld>
+  <p:clrMapOvr>
+    <a:masterClrMapping/>
+  </p:clrMapOvr>
+</p:sld>
+</file>
+
+<file path=ppt/slides/slide14.xml><?xml version="1.0" encoding="utf-8"?>
+<p:sld xmlns:a="http://schemas.openxmlformats.org/drawingml/2006/main" xmlns:r="http://schemas.openxmlformats.org/officeDocument/2006/relationships" xmlns:p="http://schemas.openxmlformats.org/presentationml/2006/main">
+  <p:cSld>
+    <p:spTree>
+      <p:nvGrpSpPr>
+        <p:cNvPr id="1" name=""/>
+        <p:cNvGrpSpPr/>
+        <p:nvPr/>
+      </p:nvGrpSpPr>
+      <p:grpSpPr>
+        <a:xfrm>
+          <a:off x="0" y="0"/>
+          <a:ext cx="0" cy="0"/>
+          <a:chOff x="0" y="0"/>
+          <a:chExt cx="0" cy="0"/>
+        </a:xfrm>
+      </p:grpSpPr>
+      <p:sp>
+        <p:nvSpPr>
+          <p:cNvPr id="2" name="Rectangle 1"/>
+          <p:cNvSpPr/>
+          <p:nvPr/>
+        </p:nvSpPr>
+        <p:spPr>
+          <a:xfrm>
+            <a:off x="0" y="0"/>
             <a:ext cx="12191695" cy="6858000"/>
           </a:xfrm>
           <a:prstGeom prst="rect">
